--- a/신뢰구간 임용고시 2018.pptx
+++ b/신뢰구간 임용고시 2018.pptx
@@ -253,7 +253,7 @@
           <a:p>
             <a:fld id="{5B3AD1D6-AE87-C841-B3FD-7C9F7FCAE5AE}" type="datetimeFigureOut">
               <a:rPr lang="en-US" smtClean="0"/>
-              <a:t>12/15/19</a:t>
+              <a:t>12/17/19</a:t>
             </a:fld>
             <a:endParaRPr lang="en-US"/>
           </a:p>
@@ -423,7 +423,7 @@
           <a:p>
             <a:fld id="{5B3AD1D6-AE87-C841-B3FD-7C9F7FCAE5AE}" type="datetimeFigureOut">
               <a:rPr lang="en-US" smtClean="0"/>
-              <a:t>12/15/19</a:t>
+              <a:t>12/17/19</a:t>
             </a:fld>
             <a:endParaRPr lang="en-US"/>
           </a:p>
@@ -603,7 +603,7 @@
           <a:p>
             <a:fld id="{5B3AD1D6-AE87-C841-B3FD-7C9F7FCAE5AE}" type="datetimeFigureOut">
               <a:rPr lang="en-US" smtClean="0"/>
-              <a:t>12/15/19</a:t>
+              <a:t>12/17/19</a:t>
             </a:fld>
             <a:endParaRPr lang="en-US"/>
           </a:p>
@@ -773,7 +773,7 @@
           <a:p>
             <a:fld id="{5B3AD1D6-AE87-C841-B3FD-7C9F7FCAE5AE}" type="datetimeFigureOut">
               <a:rPr lang="en-US" smtClean="0"/>
-              <a:t>12/15/19</a:t>
+              <a:t>12/17/19</a:t>
             </a:fld>
             <a:endParaRPr lang="en-US"/>
           </a:p>
@@ -1019,7 +1019,7 @@
           <a:p>
             <a:fld id="{5B3AD1D6-AE87-C841-B3FD-7C9F7FCAE5AE}" type="datetimeFigureOut">
               <a:rPr lang="en-US" smtClean="0"/>
-              <a:t>12/15/19</a:t>
+              <a:t>12/17/19</a:t>
             </a:fld>
             <a:endParaRPr lang="en-US"/>
           </a:p>
@@ -1251,7 +1251,7 @@
           <a:p>
             <a:fld id="{5B3AD1D6-AE87-C841-B3FD-7C9F7FCAE5AE}" type="datetimeFigureOut">
               <a:rPr lang="en-US" smtClean="0"/>
-              <a:t>12/15/19</a:t>
+              <a:t>12/17/19</a:t>
             </a:fld>
             <a:endParaRPr lang="en-US"/>
           </a:p>
@@ -1618,7 +1618,7 @@
           <a:p>
             <a:fld id="{5B3AD1D6-AE87-C841-B3FD-7C9F7FCAE5AE}" type="datetimeFigureOut">
               <a:rPr lang="en-US" smtClean="0"/>
-              <a:t>12/15/19</a:t>
+              <a:t>12/17/19</a:t>
             </a:fld>
             <a:endParaRPr lang="en-US"/>
           </a:p>
@@ -1736,7 +1736,7 @@
           <a:p>
             <a:fld id="{5B3AD1D6-AE87-C841-B3FD-7C9F7FCAE5AE}" type="datetimeFigureOut">
               <a:rPr lang="en-US" smtClean="0"/>
-              <a:t>12/15/19</a:t>
+              <a:t>12/17/19</a:t>
             </a:fld>
             <a:endParaRPr lang="en-US"/>
           </a:p>
@@ -1831,7 +1831,7 @@
           <a:p>
             <a:fld id="{5B3AD1D6-AE87-C841-B3FD-7C9F7FCAE5AE}" type="datetimeFigureOut">
               <a:rPr lang="en-US" smtClean="0"/>
-              <a:t>12/15/19</a:t>
+              <a:t>12/17/19</a:t>
             </a:fld>
             <a:endParaRPr lang="en-US"/>
           </a:p>
@@ -2108,7 +2108,7 @@
           <a:p>
             <a:fld id="{5B3AD1D6-AE87-C841-B3FD-7C9F7FCAE5AE}" type="datetimeFigureOut">
               <a:rPr lang="en-US" smtClean="0"/>
-              <a:t>12/15/19</a:t>
+              <a:t>12/17/19</a:t>
             </a:fld>
             <a:endParaRPr lang="en-US"/>
           </a:p>
@@ -2361,7 +2361,7 @@
           <a:p>
             <a:fld id="{5B3AD1D6-AE87-C841-B3FD-7C9F7FCAE5AE}" type="datetimeFigureOut">
               <a:rPr lang="en-US" smtClean="0"/>
-              <a:t>12/15/19</a:t>
+              <a:t>12/17/19</a:t>
             </a:fld>
             <a:endParaRPr lang="en-US"/>
           </a:p>
@@ -2574,7 +2574,7 @@
           <a:p>
             <a:fld id="{5B3AD1D6-AE87-C841-B3FD-7C9F7FCAE5AE}" type="datetimeFigureOut">
               <a:rPr lang="en-US" smtClean="0"/>
-              <a:t>12/15/19</a:t>
+              <a:t>12/17/19</a:t>
             </a:fld>
             <a:endParaRPr lang="en-US"/>
           </a:p>
@@ -3217,7 +3217,7 @@
                 <a:ea typeface="Arial Black" charset="0"/>
                 <a:cs typeface="Arial Black" charset="0"/>
               </a:rPr>
-              <a:t/>
+              <a:t>2018</a:t>
             </a:r>
             <a:br>
               <a:rPr lang="en-US" sz="6700" dirty="0" smtClean="0">
@@ -3270,6 +3270,13 @@
   <p:clrMapOvr>
     <a:masterClrMapping/>
   </p:clrMapOvr>
+  <p:timing>
+    <p:tnLst>
+      <p:par>
+        <p:cTn id="1" dur="indefinite" restart="never" nodeType="tmRoot"/>
+      </p:par>
+    </p:tnLst>
+  </p:timing>
 </p:sld>
 </file>
 
@@ -3450,6 +3457,13 @@
   <p:clrMapOvr>
     <a:masterClrMapping/>
   </p:clrMapOvr>
+  <p:timing>
+    <p:tnLst>
+      <p:par>
+        <p:cTn id="1" dur="indefinite" restart="never" nodeType="tmRoot"/>
+      </p:par>
+    </p:tnLst>
+  </p:timing>
 </p:sld>
 </file>
 
@@ -3600,6 +3614,13 @@
   <p:clrMapOvr>
     <a:masterClrMapping/>
   </p:clrMapOvr>
+  <p:timing>
+    <p:tnLst>
+      <p:par>
+        <p:cTn id="1" dur="indefinite" restart="never" nodeType="tmRoot"/>
+      </p:par>
+    </p:tnLst>
+  </p:timing>
 </p:sld>
 </file>
 
@@ -3855,6 +3876,13 @@
   <p:clrMapOvr>
     <a:masterClrMapping/>
   </p:clrMapOvr>
+  <p:timing>
+    <p:tnLst>
+      <p:par>
+        <p:cTn id="1" dur="indefinite" restart="never" nodeType="tmRoot"/>
+      </p:par>
+    </p:tnLst>
+  </p:timing>
 </p:sld>
 </file>
 
@@ -3975,6 +4003,13 @@
   <p:clrMapOvr>
     <a:masterClrMapping/>
   </p:clrMapOvr>
+  <p:timing>
+    <p:tnLst>
+      <p:par>
+        <p:cTn id="1" dur="indefinite" restart="never" nodeType="tmRoot"/>
+      </p:par>
+    </p:tnLst>
+  </p:timing>
 </p:sld>
 </file>
 
@@ -4155,6 +4190,13 @@
   <p:clrMapOvr>
     <a:masterClrMapping/>
   </p:clrMapOvr>
+  <p:timing>
+    <p:tnLst>
+      <p:par>
+        <p:cTn id="1" dur="indefinite" restart="never" nodeType="tmRoot"/>
+      </p:par>
+    </p:tnLst>
+  </p:timing>
 </p:sld>
 </file>
 
@@ -4335,6 +4377,13 @@
   <p:clrMapOvr>
     <a:masterClrMapping/>
   </p:clrMapOvr>
+  <p:timing>
+    <p:tnLst>
+      <p:par>
+        <p:cTn id="1" dur="indefinite" restart="never" nodeType="tmRoot"/>
+      </p:par>
+    </p:tnLst>
+  </p:timing>
 </p:sld>
 </file>
 
@@ -4485,6 +4534,13 @@
   <p:clrMapOvr>
     <a:masterClrMapping/>
   </p:clrMapOvr>
+  <p:timing>
+    <p:tnLst>
+      <p:par>
+        <p:cTn id="1" dur="indefinite" restart="never" nodeType="tmRoot"/>
+      </p:par>
+    </p:tnLst>
+  </p:timing>
 </p:sld>
 </file>
 
@@ -4665,6 +4721,13 @@
   <p:clrMapOvr>
     <a:masterClrMapping/>
   </p:clrMapOvr>
+  <p:timing>
+    <p:tnLst>
+      <p:par>
+        <p:cTn id="1" dur="indefinite" restart="never" nodeType="tmRoot"/>
+      </p:par>
+    </p:tnLst>
+  </p:timing>
 </p:sld>
 </file>
 
@@ -4845,6 +4908,13 @@
   <p:clrMapOvr>
     <a:masterClrMapping/>
   </p:clrMapOvr>
+  <p:timing>
+    <p:tnLst>
+      <p:par>
+        <p:cTn id="1" dur="indefinite" restart="never" nodeType="tmRoot"/>
+      </p:par>
+    </p:tnLst>
+  </p:timing>
 </p:sld>
 </file>
 
